--- a/hlx-werbematerial/ausgabe/01_Endnutzer/Social/Allgemein/Bearbeitbar-PPTX/END-Karussell-1von5_1080x1350.pptx
+++ b/hlx-werbematerial/ausgabe/01_Endnutzer/Social/Allgemein/Bearbeitbar-PPTX/END-Karussell-1von5_1080x1350.pptx
@@ -870,7 +870,7 @@
       </p:grpSpPr>
       <p:pic>
         <p:nvPicPr>
-          <p:cNvPr id="2" name="Image 0" descr="/home/user/healthleticx-website-redesign-/hlx-werbematerial/.build/END-Karussell-1von5_1080x1350_bg.png">    </p:cNvPr>
+          <p:cNvPr id="2" name="Image 0" descr="/home/user/healthleticx-website-redesign-/hlx-werbematerial/.build/END-Karussell-1von5_1080x1350_bg0.png">    </p:cNvPr>
           <p:cNvPicPr>
             <a:picLocks noChangeAspect="1"/>
           </p:cNvPicPr>
